--- a/AI-Powered-MEP-Systems-Auditor.pptx
+++ b/AI-Powered-MEP-Systems-Auditor.pptx
@@ -123,6 +123,35 @@
     </p:ext>
   </p:extLst>
 </p:presentation>
+</file>
+
+<file path=ppt/changesInfos/changesInfo1.xml><?xml version="1.0" encoding="utf-8"?>
+<pc:chgInfo xmlns:a="http://schemas.openxmlformats.org/drawingml/2006/main" xmlns:r="http://schemas.openxmlformats.org/officeDocument/2006/relationships" xmlns:ac="http://schemas.microsoft.com/office/drawing/2013/main/command" xmlns:pc="http://schemas.microsoft.com/office/powerpoint/2013/main/command">
+  <pc:docChgLst>
+    <pc:chgData name="Oskar Lindström" userId="ac0e1764-6761-4601-b8bd-07aade46fddd" providerId="ADAL" clId="{60D17DC1-0868-4749-93F0-44E589C57C87}"/>
+    <pc:docChg chg="modSld">
+      <pc:chgData name="Oskar Lindström" userId="ac0e1764-6761-4601-b8bd-07aade46fddd" providerId="ADAL" clId="{60D17DC1-0868-4749-93F0-44E589C57C87}" dt="2026-04-14T14:06:31.503" v="4" actId="20577"/>
+      <pc:docMkLst>
+        <pc:docMk/>
+      </pc:docMkLst>
+      <pc:sldChg chg="modSp mod">
+        <pc:chgData name="Oskar Lindström" userId="ac0e1764-6761-4601-b8bd-07aade46fddd" providerId="ADAL" clId="{60D17DC1-0868-4749-93F0-44E589C57C87}" dt="2026-04-14T14:06:31.503" v="4" actId="20577"/>
+        <pc:sldMkLst>
+          <pc:docMk/>
+          <pc:sldMk cId="0" sldId="258"/>
+        </pc:sldMkLst>
+        <pc:spChg chg="mod">
+          <ac:chgData name="Oskar Lindström" userId="ac0e1764-6761-4601-b8bd-07aade46fddd" providerId="ADAL" clId="{60D17DC1-0868-4749-93F0-44E589C57C87}" dt="2026-04-14T14:06:31.503" v="4" actId="20577"/>
+          <ac:spMkLst>
+            <pc:docMk/>
+            <pc:sldMk cId="0" sldId="258"/>
+            <ac:spMk id="2" creationId="{00000000-0000-0000-0000-000000000000}"/>
+          </ac:spMkLst>
+        </pc:spChg>
+      </pc:sldChg>
+    </pc:docChg>
+  </pc:docChgLst>
+</pc:chgInfo>
 </file>
 
 <file path=ppt/notesMasters/notesMaster1.xml><?xml version="1.0" encoding="utf-8"?>
@@ -2664,7 +2693,7 @@
                 <a:ea typeface="Inter Bold" pitchFamily="34" charset="-122"/>
                 <a:cs typeface="Inter Bold" pitchFamily="34" charset="-120"/>
               </a:rPr>
-              <a:t>60 Seconds.</a:t>
+              <a:t>120 Seconds.</a:t>
             </a:r>
             <a:endParaRPr lang="en-US" sz="2550" dirty="0"/>
           </a:p>
